--- a/tests/testdata/excel/PowerPoint/並べ替え（XML編集）.pptx
+++ b/tests/testdata/excel/PowerPoint/並べ替え（XML編集）.pptx
@@ -193,7 +193,7 @@
             </a:lvl1pPr>
           </a:lstStyle>
           <a:p>
-            <a:fld id="{F82D30DA-1685-4249-AA19-471F743D1FEF}" type="datetimeFigureOut">
+            <a:fld id="{44D126FF-8EB8-4546-8F23-9477D0567866}" type="datetimeFigureOut">
               <a:rPr kumimoji="1" lang="ja-JP" altLang="en-US" smtClean="0"/>
               <a:t>2026/9/20</a:t>
             </a:fld>
@@ -383,7 +383,7 @@
             </a:lvl1pPr>
           </a:lstStyle>
           <a:p>
-            <a:fld id="{C368504F-7890-46C2-BCDD-DD4FC51F6FBC}" type="slidenum">
+            <a:fld id="{528FDD4C-A0C1-42B1-98BE-643301799C40}" type="slidenum">
               <a:rPr kumimoji="1" lang="ja-JP" altLang="en-US" smtClean="0"/>
               <a:t>‹#›</a:t>
             </a:fld>
@@ -394,7 +394,7 @@
     </p:spTree>
     <p:extLst>
       <p:ext uri="{BB962C8B-B14F-4D97-AF65-F5344CB8AC3E}">
-        <p14:creationId xmlns:p14="http://schemas.microsoft.com/office/powerpoint/2010/main" val="3859109368"/>
+        <p14:creationId xmlns:p14="http://schemas.microsoft.com/office/powerpoint/2010/main" val="4200855205"/>
       </p:ext>
     </p:extLst>
   </p:cSld>
@@ -564,7 +564,7 @@
           <a:bodyPr/>
           <a:lstStyle/>
           <a:p>
-            <a:fld id="{C368504F-7890-46C2-BCDD-DD4FC51F6FBC}" type="slidenum">
+            <a:fld id="{528FDD4C-A0C1-42B1-98BE-643301799C40}" type="slidenum">
               <a:rPr kumimoji="1" lang="ja-JP" altLang="en-US" smtClean="0"/>
               <a:t>3</a:t>
             </a:fld>
@@ -575,7 +575,7 @@
     </p:spTree>
     <p:extLst>
       <p:ext uri="{BB962C8B-B14F-4D97-AF65-F5344CB8AC3E}">
-        <p14:creationId xmlns:p14="http://schemas.microsoft.com/office/powerpoint/2010/main" val="4100312519"/>
+        <p14:creationId xmlns:p14="http://schemas.microsoft.com/office/powerpoint/2010/main" val="1739301288"/>
       </p:ext>
     </p:extLst>
   </p:cSld>
@@ -607,7 +607,7 @@
           <p:cNvPr id="2" name="タイトル 1">
             <a:extLst>
               <a:ext uri="{FF2B5EF4-FFF2-40B4-BE49-F238E27FC236}">
-                <a16:creationId xmlns:a16="http://schemas.microsoft.com/office/drawing/2014/main" id="{D8A5C22A-3B96-4AC5-FD8F-A5E6C8EFABE8}"/>
+                <a16:creationId xmlns:a16="http://schemas.microsoft.com/office/drawing/2014/main" id="{2AC45E28-DF8B-246E-3942-A3FDDA78CBAA}"/>
               </a:ext>
             </a:extLst>
           </p:cNvPr>
@@ -644,7 +644,7 @@
           <p:cNvPr id="3" name="字幕 2">
             <a:extLst>
               <a:ext uri="{FF2B5EF4-FFF2-40B4-BE49-F238E27FC236}">
-                <a16:creationId xmlns:a16="http://schemas.microsoft.com/office/drawing/2014/main" id="{B1E1C9B0-3C4A-772E-6A1A-6C3F17046B47}"/>
+                <a16:creationId xmlns:a16="http://schemas.microsoft.com/office/drawing/2014/main" id="{7F6424D1-C2A0-9C3B-17BA-29DBE7AE6B10}"/>
               </a:ext>
             </a:extLst>
           </p:cNvPr>
@@ -714,7 +714,7 @@
           <p:cNvPr id="4" name="日付プレースホルダー 3">
             <a:extLst>
               <a:ext uri="{FF2B5EF4-FFF2-40B4-BE49-F238E27FC236}">
-                <a16:creationId xmlns:a16="http://schemas.microsoft.com/office/drawing/2014/main" id="{5218B21F-E634-4E08-203C-EA5735CFF8C0}"/>
+                <a16:creationId xmlns:a16="http://schemas.microsoft.com/office/drawing/2014/main" id="{E9BE3068-3E15-58C0-8575-635FFA1002FC}"/>
               </a:ext>
             </a:extLst>
           </p:cNvPr>
@@ -730,7 +730,7 @@
           <a:bodyPr/>
           <a:lstStyle/>
           <a:p>
-            <a:fld id="{3B3138DF-D476-48FE-AC8B-9CDE86590BB1}" type="datetimeFigureOut">
+            <a:fld id="{34923347-4F8E-44AB-B563-87675CA7FBD5}" type="datetimeFigureOut">
               <a:rPr kumimoji="1" lang="ja-JP" altLang="en-US" smtClean="0"/>
               <a:t>2026/9/20</a:t>
             </a:fld>
@@ -743,7 +743,7 @@
           <p:cNvPr id="5" name="フッター プレースホルダー 4">
             <a:extLst>
               <a:ext uri="{FF2B5EF4-FFF2-40B4-BE49-F238E27FC236}">
-                <a16:creationId xmlns:a16="http://schemas.microsoft.com/office/drawing/2014/main" id="{467A94C7-B1AC-6157-F6E8-82F0BF26742B}"/>
+                <a16:creationId xmlns:a16="http://schemas.microsoft.com/office/drawing/2014/main" id="{ACA3573E-741E-1D23-A7F5-6C6C8078E750}"/>
               </a:ext>
             </a:extLst>
           </p:cNvPr>
@@ -768,7 +768,7 @@
           <p:cNvPr id="6" name="スライド番号プレースホルダー 5">
             <a:extLst>
               <a:ext uri="{FF2B5EF4-FFF2-40B4-BE49-F238E27FC236}">
-                <a16:creationId xmlns:a16="http://schemas.microsoft.com/office/drawing/2014/main" id="{637D98ED-E539-5814-60BB-B5B7999E0FCF}"/>
+                <a16:creationId xmlns:a16="http://schemas.microsoft.com/office/drawing/2014/main" id="{53FAC4B5-4F65-4CDF-60FD-499D2CC9D3B4}"/>
               </a:ext>
             </a:extLst>
           </p:cNvPr>
@@ -784,7 +784,7 @@
           <a:bodyPr/>
           <a:lstStyle/>
           <a:p>
-            <a:fld id="{99F07D30-DBFD-42BE-B13F-09738E60C017}" type="slidenum">
+            <a:fld id="{F27F1E47-E9E4-43B0-93A2-86EE23F635F6}" type="slidenum">
               <a:rPr kumimoji="1" lang="ja-JP" altLang="en-US" smtClean="0"/>
               <a:t>‹#›</a:t>
             </a:fld>
@@ -795,7 +795,7 @@
     </p:spTree>
     <p:extLst>
       <p:ext uri="{BB962C8B-B14F-4D97-AF65-F5344CB8AC3E}">
-        <p14:creationId xmlns:p14="http://schemas.microsoft.com/office/powerpoint/2010/main" val="2154142200"/>
+        <p14:creationId xmlns:p14="http://schemas.microsoft.com/office/powerpoint/2010/main" val="2918982483"/>
       </p:ext>
     </p:extLst>
   </p:cSld>
@@ -827,7 +827,7 @@
           <p:cNvPr id="2" name="タイトル 1">
             <a:extLst>
               <a:ext uri="{FF2B5EF4-FFF2-40B4-BE49-F238E27FC236}">
-                <a16:creationId xmlns:a16="http://schemas.microsoft.com/office/drawing/2014/main" id="{485E6A69-F6C0-CCA3-F889-6202F359C11A}"/>
+                <a16:creationId xmlns:a16="http://schemas.microsoft.com/office/drawing/2014/main" id="{41FE8E89-1C1E-313C-2458-35CA8A95F8AD}"/>
               </a:ext>
             </a:extLst>
           </p:cNvPr>
@@ -855,7 +855,7 @@
           <p:cNvPr id="3" name="縦書きテキスト プレースホルダー 2">
             <a:extLst>
               <a:ext uri="{FF2B5EF4-FFF2-40B4-BE49-F238E27FC236}">
-                <a16:creationId xmlns:a16="http://schemas.microsoft.com/office/drawing/2014/main" id="{A52183A6-5DE1-FED0-81AE-3BE504C91FF3}"/>
+                <a16:creationId xmlns:a16="http://schemas.microsoft.com/office/drawing/2014/main" id="{3D985037-622B-CAD5-4461-80CB371AA0F0}"/>
               </a:ext>
             </a:extLst>
           </p:cNvPr>
@@ -944,7 +944,7 @@
           <p:cNvPr id="4" name="日付プレースホルダー 3">
             <a:extLst>
               <a:ext uri="{FF2B5EF4-FFF2-40B4-BE49-F238E27FC236}">
-                <a16:creationId xmlns:a16="http://schemas.microsoft.com/office/drawing/2014/main" id="{27B3E651-47EF-23B2-63F1-363EB3D2238D}"/>
+                <a16:creationId xmlns:a16="http://schemas.microsoft.com/office/drawing/2014/main" id="{E1D2807E-6195-F0EC-3108-D6A691663F41}"/>
               </a:ext>
             </a:extLst>
           </p:cNvPr>
@@ -960,7 +960,7 @@
           <a:bodyPr/>
           <a:lstStyle/>
           <a:p>
-            <a:fld id="{3B3138DF-D476-48FE-AC8B-9CDE86590BB1}" type="datetimeFigureOut">
+            <a:fld id="{34923347-4F8E-44AB-B563-87675CA7FBD5}" type="datetimeFigureOut">
               <a:rPr kumimoji="1" lang="ja-JP" altLang="en-US" smtClean="0"/>
               <a:t>2026/9/20</a:t>
             </a:fld>
@@ -973,7 +973,7 @@
           <p:cNvPr id="5" name="フッター プレースホルダー 4">
             <a:extLst>
               <a:ext uri="{FF2B5EF4-FFF2-40B4-BE49-F238E27FC236}">
-                <a16:creationId xmlns:a16="http://schemas.microsoft.com/office/drawing/2014/main" id="{64FC588F-AE29-AC10-4906-D49A6D02C5D5}"/>
+                <a16:creationId xmlns:a16="http://schemas.microsoft.com/office/drawing/2014/main" id="{3ED0D945-7181-BF8C-8036-4F7CAE271D58}"/>
               </a:ext>
             </a:extLst>
           </p:cNvPr>
@@ -998,7 +998,7 @@
           <p:cNvPr id="6" name="スライド番号プレースホルダー 5">
             <a:extLst>
               <a:ext uri="{FF2B5EF4-FFF2-40B4-BE49-F238E27FC236}">
-                <a16:creationId xmlns:a16="http://schemas.microsoft.com/office/drawing/2014/main" id="{53944CA7-B4EA-D0BF-6283-EBB9A434D055}"/>
+                <a16:creationId xmlns:a16="http://schemas.microsoft.com/office/drawing/2014/main" id="{342661DC-FE17-7441-0E62-C445ECD51D56}"/>
               </a:ext>
             </a:extLst>
           </p:cNvPr>
@@ -1014,7 +1014,7 @@
           <a:bodyPr/>
           <a:lstStyle/>
           <a:p>
-            <a:fld id="{99F07D30-DBFD-42BE-B13F-09738E60C017}" type="slidenum">
+            <a:fld id="{F27F1E47-E9E4-43B0-93A2-86EE23F635F6}" type="slidenum">
               <a:rPr kumimoji="1" lang="ja-JP" altLang="en-US" smtClean="0"/>
               <a:t>‹#›</a:t>
             </a:fld>
@@ -1025,7 +1025,7 @@
     </p:spTree>
     <p:extLst>
       <p:ext uri="{BB962C8B-B14F-4D97-AF65-F5344CB8AC3E}">
-        <p14:creationId xmlns:p14="http://schemas.microsoft.com/office/powerpoint/2010/main" val="924809503"/>
+        <p14:creationId xmlns:p14="http://schemas.microsoft.com/office/powerpoint/2010/main" val="1896107959"/>
       </p:ext>
     </p:extLst>
   </p:cSld>
@@ -1057,7 +1057,7 @@
           <p:cNvPr id="2" name="縦書きタイトル 1">
             <a:extLst>
               <a:ext uri="{FF2B5EF4-FFF2-40B4-BE49-F238E27FC236}">
-                <a16:creationId xmlns:a16="http://schemas.microsoft.com/office/drawing/2014/main" id="{CD08F8AB-835D-AA13-C7AD-C8BBFBCADECD}"/>
+                <a16:creationId xmlns:a16="http://schemas.microsoft.com/office/drawing/2014/main" id="{DC48879B-8092-6709-E267-5053602F2472}"/>
               </a:ext>
             </a:extLst>
           </p:cNvPr>
@@ -1090,7 +1090,7 @@
           <p:cNvPr id="3" name="縦書きテキスト プレースホルダー 2">
             <a:extLst>
               <a:ext uri="{FF2B5EF4-FFF2-40B4-BE49-F238E27FC236}">
-                <a16:creationId xmlns:a16="http://schemas.microsoft.com/office/drawing/2014/main" id="{DEAD076B-378E-00E4-48DD-843D930534D2}"/>
+                <a16:creationId xmlns:a16="http://schemas.microsoft.com/office/drawing/2014/main" id="{D366C346-FA43-2A5F-F3D5-9B12B7D06838}"/>
               </a:ext>
             </a:extLst>
           </p:cNvPr>
@@ -1184,7 +1184,7 @@
           <p:cNvPr id="4" name="日付プレースホルダー 3">
             <a:extLst>
               <a:ext uri="{FF2B5EF4-FFF2-40B4-BE49-F238E27FC236}">
-                <a16:creationId xmlns:a16="http://schemas.microsoft.com/office/drawing/2014/main" id="{D2DA2025-3967-3712-9A27-E6B52B3298A7}"/>
+                <a16:creationId xmlns:a16="http://schemas.microsoft.com/office/drawing/2014/main" id="{B4A92F21-5276-C99B-43D7-56D0CB47F465}"/>
               </a:ext>
             </a:extLst>
           </p:cNvPr>
@@ -1200,7 +1200,7 @@
           <a:bodyPr/>
           <a:lstStyle/>
           <a:p>
-            <a:fld id="{3B3138DF-D476-48FE-AC8B-9CDE86590BB1}" type="datetimeFigureOut">
+            <a:fld id="{34923347-4F8E-44AB-B563-87675CA7FBD5}" type="datetimeFigureOut">
               <a:rPr kumimoji="1" lang="ja-JP" altLang="en-US" smtClean="0"/>
               <a:t>2026/9/20</a:t>
             </a:fld>
@@ -1213,7 +1213,7 @@
           <p:cNvPr id="5" name="フッター プレースホルダー 4">
             <a:extLst>
               <a:ext uri="{FF2B5EF4-FFF2-40B4-BE49-F238E27FC236}">
-                <a16:creationId xmlns:a16="http://schemas.microsoft.com/office/drawing/2014/main" id="{AD8CCC1E-9B8B-6081-219E-0093CD374EEC}"/>
+                <a16:creationId xmlns:a16="http://schemas.microsoft.com/office/drawing/2014/main" id="{2A7B86AA-A781-A43F-2CA7-D288AF4D58C8}"/>
               </a:ext>
             </a:extLst>
           </p:cNvPr>
@@ -1238,7 +1238,7 @@
           <p:cNvPr id="6" name="スライド番号プレースホルダー 5">
             <a:extLst>
               <a:ext uri="{FF2B5EF4-FFF2-40B4-BE49-F238E27FC236}">
-                <a16:creationId xmlns:a16="http://schemas.microsoft.com/office/drawing/2014/main" id="{6AF4FC77-A4E2-72BB-B073-EAFFC171FBD7}"/>
+                <a16:creationId xmlns:a16="http://schemas.microsoft.com/office/drawing/2014/main" id="{3EBA936C-151C-D9E9-7C5E-67D9368EE613}"/>
               </a:ext>
             </a:extLst>
           </p:cNvPr>
@@ -1254,7 +1254,7 @@
           <a:bodyPr/>
           <a:lstStyle/>
           <a:p>
-            <a:fld id="{99F07D30-DBFD-42BE-B13F-09738E60C017}" type="slidenum">
+            <a:fld id="{F27F1E47-E9E4-43B0-93A2-86EE23F635F6}" type="slidenum">
               <a:rPr kumimoji="1" lang="ja-JP" altLang="en-US" smtClean="0"/>
               <a:t>‹#›</a:t>
             </a:fld>
@@ -1265,7 +1265,7 @@
     </p:spTree>
     <p:extLst>
       <p:ext uri="{BB962C8B-B14F-4D97-AF65-F5344CB8AC3E}">
-        <p14:creationId xmlns:p14="http://schemas.microsoft.com/office/powerpoint/2010/main" val="1455332994"/>
+        <p14:creationId xmlns:p14="http://schemas.microsoft.com/office/powerpoint/2010/main" val="4219211040"/>
       </p:ext>
     </p:extLst>
   </p:cSld>
@@ -1297,7 +1297,7 @@
           <p:cNvPr id="2" name="タイトル 1">
             <a:extLst>
               <a:ext uri="{FF2B5EF4-FFF2-40B4-BE49-F238E27FC236}">
-                <a16:creationId xmlns:a16="http://schemas.microsoft.com/office/drawing/2014/main" id="{9EBD7937-4C28-DA4E-0A5C-9A528F690A9D}"/>
+                <a16:creationId xmlns:a16="http://schemas.microsoft.com/office/drawing/2014/main" id="{7E07F675-49D0-4DCB-EB2F-758597AD9340}"/>
               </a:ext>
             </a:extLst>
           </p:cNvPr>
@@ -1325,7 +1325,7 @@
           <p:cNvPr id="3" name="テキスト プレースホルダー 2">
             <a:extLst>
               <a:ext uri="{FF2B5EF4-FFF2-40B4-BE49-F238E27FC236}">
-                <a16:creationId xmlns:a16="http://schemas.microsoft.com/office/drawing/2014/main" id="{DBA20CB6-F017-0335-EC7A-2FEF656234E5}"/>
+                <a16:creationId xmlns:a16="http://schemas.microsoft.com/office/drawing/2014/main" id="{463F8F1E-F5FF-68F9-921E-9E636B39A275}"/>
               </a:ext>
             </a:extLst>
           </p:cNvPr>
@@ -1414,7 +1414,7 @@
           <p:cNvPr id="4" name="日付プレースホルダー 3">
             <a:extLst>
               <a:ext uri="{FF2B5EF4-FFF2-40B4-BE49-F238E27FC236}">
-                <a16:creationId xmlns:a16="http://schemas.microsoft.com/office/drawing/2014/main" id="{9C5529FE-D0B7-81D8-7817-61BD7C4DA269}"/>
+                <a16:creationId xmlns:a16="http://schemas.microsoft.com/office/drawing/2014/main" id="{A2EBCA38-E8F0-AEBE-303A-EEE6C4B9A50C}"/>
               </a:ext>
             </a:extLst>
           </p:cNvPr>
@@ -1430,7 +1430,7 @@
           <a:bodyPr/>
           <a:lstStyle/>
           <a:p>
-            <a:fld id="{3B3138DF-D476-48FE-AC8B-9CDE86590BB1}" type="datetimeFigureOut">
+            <a:fld id="{34923347-4F8E-44AB-B563-87675CA7FBD5}" type="datetimeFigureOut">
               <a:rPr kumimoji="1" lang="ja-JP" altLang="en-US" smtClean="0"/>
               <a:t>2026/9/20</a:t>
             </a:fld>
@@ -1443,7 +1443,7 @@
           <p:cNvPr id="5" name="フッター プレースホルダー 4">
             <a:extLst>
               <a:ext uri="{FF2B5EF4-FFF2-40B4-BE49-F238E27FC236}">
-                <a16:creationId xmlns:a16="http://schemas.microsoft.com/office/drawing/2014/main" id="{E9B02FE2-09E0-C8E3-D866-EE14A937FEDE}"/>
+                <a16:creationId xmlns:a16="http://schemas.microsoft.com/office/drawing/2014/main" id="{3BEC72AD-2E9F-CAEC-0497-5EE0A8814853}"/>
               </a:ext>
             </a:extLst>
           </p:cNvPr>
@@ -1468,7 +1468,7 @@
           <p:cNvPr id="6" name="スライド番号プレースホルダー 5">
             <a:extLst>
               <a:ext uri="{FF2B5EF4-FFF2-40B4-BE49-F238E27FC236}">
-                <a16:creationId xmlns:a16="http://schemas.microsoft.com/office/drawing/2014/main" id="{1253A7C2-F58F-5767-ED70-418492E470F9}"/>
+                <a16:creationId xmlns:a16="http://schemas.microsoft.com/office/drawing/2014/main" id="{CBDE67C2-AF0C-1832-A98B-3BCE33701887}"/>
               </a:ext>
             </a:extLst>
           </p:cNvPr>
@@ -1484,7 +1484,7 @@
           <a:bodyPr/>
           <a:lstStyle/>
           <a:p>
-            <a:fld id="{99F07D30-DBFD-42BE-B13F-09738E60C017}" type="slidenum">
+            <a:fld id="{F27F1E47-E9E4-43B0-93A2-86EE23F635F6}" type="slidenum">
               <a:rPr kumimoji="1" lang="ja-JP" altLang="en-US" smtClean="0"/>
               <a:t>‹#›</a:t>
             </a:fld>
@@ -1495,7 +1495,7 @@
     </p:spTree>
     <p:extLst>
       <p:ext uri="{BB962C8B-B14F-4D97-AF65-F5344CB8AC3E}">
-        <p14:creationId xmlns:p14="http://schemas.microsoft.com/office/powerpoint/2010/main" val="173314681"/>
+        <p14:creationId xmlns:p14="http://schemas.microsoft.com/office/powerpoint/2010/main" val="2244187044"/>
       </p:ext>
     </p:extLst>
   </p:cSld>
@@ -1527,7 +1527,7 @@
           <p:cNvPr id="2" name="タイトル 1">
             <a:extLst>
               <a:ext uri="{FF2B5EF4-FFF2-40B4-BE49-F238E27FC236}">
-                <a16:creationId xmlns:a16="http://schemas.microsoft.com/office/drawing/2014/main" id="{87638825-FA6C-ABBF-F57A-9D2CBB822FE7}"/>
+                <a16:creationId xmlns:a16="http://schemas.microsoft.com/office/drawing/2014/main" id="{A3A9F1E8-CC6E-0AAB-DF34-91C331C33786}"/>
               </a:ext>
             </a:extLst>
           </p:cNvPr>
@@ -1555,7 +1555,7 @@
           <p:cNvPr id="3" name="コンテンツ プレースホルダー 2">
             <a:extLst>
               <a:ext uri="{FF2B5EF4-FFF2-40B4-BE49-F238E27FC236}">
-                <a16:creationId xmlns:a16="http://schemas.microsoft.com/office/drawing/2014/main" id="{D484B802-02BB-C751-48DD-B3BBB9807D4C}"/>
+                <a16:creationId xmlns:a16="http://schemas.microsoft.com/office/drawing/2014/main" id="{FEEA7B78-D2A1-994D-1ACC-845D5A051BA4}"/>
               </a:ext>
             </a:extLst>
           </p:cNvPr>
@@ -1644,7 +1644,7 @@
           <p:cNvPr id="4" name="日付プレースホルダー 3">
             <a:extLst>
               <a:ext uri="{FF2B5EF4-FFF2-40B4-BE49-F238E27FC236}">
-                <a16:creationId xmlns:a16="http://schemas.microsoft.com/office/drawing/2014/main" id="{9EC439EB-EEC3-9356-20F1-6B08DAD04D84}"/>
+                <a16:creationId xmlns:a16="http://schemas.microsoft.com/office/drawing/2014/main" id="{C6D94C94-D988-A857-5754-765A5F18138C}"/>
               </a:ext>
             </a:extLst>
           </p:cNvPr>
@@ -1660,7 +1660,7 @@
           <a:bodyPr/>
           <a:lstStyle/>
           <a:p>
-            <a:fld id="{3B3138DF-D476-48FE-AC8B-9CDE86590BB1}" type="datetimeFigureOut">
+            <a:fld id="{34923347-4F8E-44AB-B563-87675CA7FBD5}" type="datetimeFigureOut">
               <a:rPr kumimoji="1" lang="ja-JP" altLang="en-US" smtClean="0"/>
               <a:t>2026/9/20</a:t>
             </a:fld>
@@ -1673,7 +1673,7 @@
           <p:cNvPr id="5" name="フッター プレースホルダー 4">
             <a:extLst>
               <a:ext uri="{FF2B5EF4-FFF2-40B4-BE49-F238E27FC236}">
-                <a16:creationId xmlns:a16="http://schemas.microsoft.com/office/drawing/2014/main" id="{453D98E7-1836-C813-7EA0-4EFB7AB1420E}"/>
+                <a16:creationId xmlns:a16="http://schemas.microsoft.com/office/drawing/2014/main" id="{FABEFCD8-CD9D-E1D0-4435-5012F8D45902}"/>
               </a:ext>
             </a:extLst>
           </p:cNvPr>
@@ -1698,7 +1698,7 @@
           <p:cNvPr id="6" name="スライド番号プレースホルダー 5">
             <a:extLst>
               <a:ext uri="{FF2B5EF4-FFF2-40B4-BE49-F238E27FC236}">
-                <a16:creationId xmlns:a16="http://schemas.microsoft.com/office/drawing/2014/main" id="{FD87383C-203A-DD58-8814-2C7EC63443A6}"/>
+                <a16:creationId xmlns:a16="http://schemas.microsoft.com/office/drawing/2014/main" id="{4E301237-BCC3-71BD-111A-557550229645}"/>
               </a:ext>
             </a:extLst>
           </p:cNvPr>
@@ -1714,7 +1714,7 @@
           <a:bodyPr/>
           <a:lstStyle/>
           <a:p>
-            <a:fld id="{99F07D30-DBFD-42BE-B13F-09738E60C017}" type="slidenum">
+            <a:fld id="{F27F1E47-E9E4-43B0-93A2-86EE23F635F6}" type="slidenum">
               <a:rPr kumimoji="1" lang="ja-JP" altLang="en-US" smtClean="0"/>
               <a:t>‹#›</a:t>
             </a:fld>
@@ -1725,7 +1725,7 @@
     </p:spTree>
     <p:extLst>
       <p:ext uri="{BB962C8B-B14F-4D97-AF65-F5344CB8AC3E}">
-        <p14:creationId xmlns:p14="http://schemas.microsoft.com/office/powerpoint/2010/main" val="1518583601"/>
+        <p14:creationId xmlns:p14="http://schemas.microsoft.com/office/powerpoint/2010/main" val="2003100698"/>
       </p:ext>
     </p:extLst>
   </p:cSld>
@@ -1757,7 +1757,7 @@
           <p:cNvPr id="2" name="タイトル 1">
             <a:extLst>
               <a:ext uri="{FF2B5EF4-FFF2-40B4-BE49-F238E27FC236}">
-                <a16:creationId xmlns:a16="http://schemas.microsoft.com/office/drawing/2014/main" id="{74D7F21A-1AFA-67A8-5DA5-953E7EE5A9C0}"/>
+                <a16:creationId xmlns:a16="http://schemas.microsoft.com/office/drawing/2014/main" id="{3E2545FF-BFB8-A7E1-3507-E0F04D70D9FA}"/>
               </a:ext>
             </a:extLst>
           </p:cNvPr>
@@ -1794,7 +1794,7 @@
           <p:cNvPr id="3" name="テキスト プレースホルダー 2">
             <a:extLst>
               <a:ext uri="{FF2B5EF4-FFF2-40B4-BE49-F238E27FC236}">
-                <a16:creationId xmlns:a16="http://schemas.microsoft.com/office/drawing/2014/main" id="{D7D78EC7-58BC-9641-B152-9F7DBBBD05A2}"/>
+                <a16:creationId xmlns:a16="http://schemas.microsoft.com/office/drawing/2014/main" id="{C5A5283A-F7C9-17C8-3F8A-9A37A95C1FF9}"/>
               </a:ext>
             </a:extLst>
           </p:cNvPr>
@@ -1919,7 +1919,7 @@
           <p:cNvPr id="4" name="日付プレースホルダー 3">
             <a:extLst>
               <a:ext uri="{FF2B5EF4-FFF2-40B4-BE49-F238E27FC236}">
-                <a16:creationId xmlns:a16="http://schemas.microsoft.com/office/drawing/2014/main" id="{A56C5500-7FE6-6EDC-8D0E-D758392C0FBD}"/>
+                <a16:creationId xmlns:a16="http://schemas.microsoft.com/office/drawing/2014/main" id="{C6778D7D-763E-C209-F317-88544073ACE9}"/>
               </a:ext>
             </a:extLst>
           </p:cNvPr>
@@ -1935,7 +1935,7 @@
           <a:bodyPr/>
           <a:lstStyle/>
           <a:p>
-            <a:fld id="{3B3138DF-D476-48FE-AC8B-9CDE86590BB1}" type="datetimeFigureOut">
+            <a:fld id="{34923347-4F8E-44AB-B563-87675CA7FBD5}" type="datetimeFigureOut">
               <a:rPr kumimoji="1" lang="ja-JP" altLang="en-US" smtClean="0"/>
               <a:t>2026/9/20</a:t>
             </a:fld>
@@ -1948,7 +1948,7 @@
           <p:cNvPr id="5" name="フッター プレースホルダー 4">
             <a:extLst>
               <a:ext uri="{FF2B5EF4-FFF2-40B4-BE49-F238E27FC236}">
-                <a16:creationId xmlns:a16="http://schemas.microsoft.com/office/drawing/2014/main" id="{F3FB3D84-36AB-C4D8-FB52-BD16AC9282B3}"/>
+                <a16:creationId xmlns:a16="http://schemas.microsoft.com/office/drawing/2014/main" id="{7C9D7526-AFC3-22C6-8B3C-6538A1320C48}"/>
               </a:ext>
             </a:extLst>
           </p:cNvPr>
@@ -1973,7 +1973,7 @@
           <p:cNvPr id="6" name="スライド番号プレースホルダー 5">
             <a:extLst>
               <a:ext uri="{FF2B5EF4-FFF2-40B4-BE49-F238E27FC236}">
-                <a16:creationId xmlns:a16="http://schemas.microsoft.com/office/drawing/2014/main" id="{002C5B1C-BBBA-3BE5-A5B2-5DB292C430C6}"/>
+                <a16:creationId xmlns:a16="http://schemas.microsoft.com/office/drawing/2014/main" id="{45520198-EA30-FC67-9CD2-B12E2F54BACF}"/>
               </a:ext>
             </a:extLst>
           </p:cNvPr>
@@ -1989,7 +1989,7 @@
           <a:bodyPr/>
           <a:lstStyle/>
           <a:p>
-            <a:fld id="{99F07D30-DBFD-42BE-B13F-09738E60C017}" type="slidenum">
+            <a:fld id="{F27F1E47-E9E4-43B0-93A2-86EE23F635F6}" type="slidenum">
               <a:rPr kumimoji="1" lang="ja-JP" altLang="en-US" smtClean="0"/>
               <a:t>‹#›</a:t>
             </a:fld>
@@ -2000,7 +2000,7 @@
     </p:spTree>
     <p:extLst>
       <p:ext uri="{BB962C8B-B14F-4D97-AF65-F5344CB8AC3E}">
-        <p14:creationId xmlns:p14="http://schemas.microsoft.com/office/powerpoint/2010/main" val="3963013844"/>
+        <p14:creationId xmlns:p14="http://schemas.microsoft.com/office/powerpoint/2010/main" val="3298835327"/>
       </p:ext>
     </p:extLst>
   </p:cSld>
@@ -2032,7 +2032,7 @@
           <p:cNvPr id="2" name="タイトル 1">
             <a:extLst>
               <a:ext uri="{FF2B5EF4-FFF2-40B4-BE49-F238E27FC236}">
-                <a16:creationId xmlns:a16="http://schemas.microsoft.com/office/drawing/2014/main" id="{32C797E1-FCB3-7E28-C9C3-8BF1965916F4}"/>
+                <a16:creationId xmlns:a16="http://schemas.microsoft.com/office/drawing/2014/main" id="{F5B56345-3E64-E140-6CA7-2528871041B9}"/>
               </a:ext>
             </a:extLst>
           </p:cNvPr>
@@ -2060,7 +2060,7 @@
           <p:cNvPr id="3" name="コンテンツ プレースホルダー 2">
             <a:extLst>
               <a:ext uri="{FF2B5EF4-FFF2-40B4-BE49-F238E27FC236}">
-                <a16:creationId xmlns:a16="http://schemas.microsoft.com/office/drawing/2014/main" id="{F8A95C9E-D149-315C-E597-F02325C0FF8D}"/>
+                <a16:creationId xmlns:a16="http://schemas.microsoft.com/office/drawing/2014/main" id="{36BE8439-6EB7-C289-31CB-9C8105FE9024}"/>
               </a:ext>
             </a:extLst>
           </p:cNvPr>
@@ -2154,7 +2154,7 @@
           <p:cNvPr id="4" name="コンテンツ プレースホルダー 3">
             <a:extLst>
               <a:ext uri="{FF2B5EF4-FFF2-40B4-BE49-F238E27FC236}">
-                <a16:creationId xmlns:a16="http://schemas.microsoft.com/office/drawing/2014/main" id="{BCAECA99-046F-3767-5832-1EA619AC36C7}"/>
+                <a16:creationId xmlns:a16="http://schemas.microsoft.com/office/drawing/2014/main" id="{80415B87-C773-BCFC-99AF-A259771C5505}"/>
               </a:ext>
             </a:extLst>
           </p:cNvPr>
@@ -2248,7 +2248,7 @@
           <p:cNvPr id="5" name="日付プレースホルダー 4">
             <a:extLst>
               <a:ext uri="{FF2B5EF4-FFF2-40B4-BE49-F238E27FC236}">
-                <a16:creationId xmlns:a16="http://schemas.microsoft.com/office/drawing/2014/main" id="{D76A5168-5772-908F-1291-8F4011ACDC7D}"/>
+                <a16:creationId xmlns:a16="http://schemas.microsoft.com/office/drawing/2014/main" id="{B5B494D6-4DC7-FD76-6537-B4A7D5545896}"/>
               </a:ext>
             </a:extLst>
           </p:cNvPr>
@@ -2264,7 +2264,7 @@
           <a:bodyPr/>
           <a:lstStyle/>
           <a:p>
-            <a:fld id="{3B3138DF-D476-48FE-AC8B-9CDE86590BB1}" type="datetimeFigureOut">
+            <a:fld id="{34923347-4F8E-44AB-B563-87675CA7FBD5}" type="datetimeFigureOut">
               <a:rPr kumimoji="1" lang="ja-JP" altLang="en-US" smtClean="0"/>
               <a:t>2026/9/20</a:t>
             </a:fld>
@@ -2277,7 +2277,7 @@
           <p:cNvPr id="6" name="フッター プレースホルダー 5">
             <a:extLst>
               <a:ext uri="{FF2B5EF4-FFF2-40B4-BE49-F238E27FC236}">
-                <a16:creationId xmlns:a16="http://schemas.microsoft.com/office/drawing/2014/main" id="{2102CB3F-64F6-18A2-F7C9-79CD84100D61}"/>
+                <a16:creationId xmlns:a16="http://schemas.microsoft.com/office/drawing/2014/main" id="{135998F3-BF49-0961-A794-38024C1B4049}"/>
               </a:ext>
             </a:extLst>
           </p:cNvPr>
@@ -2302,7 +2302,7 @@
           <p:cNvPr id="7" name="スライド番号プレースホルダー 6">
             <a:extLst>
               <a:ext uri="{FF2B5EF4-FFF2-40B4-BE49-F238E27FC236}">
-                <a16:creationId xmlns:a16="http://schemas.microsoft.com/office/drawing/2014/main" id="{C0B1AE1D-AF16-B378-06A0-185FD7FA2C31}"/>
+                <a16:creationId xmlns:a16="http://schemas.microsoft.com/office/drawing/2014/main" id="{1E38C8D6-716D-7695-0B94-A26C220D161F}"/>
               </a:ext>
             </a:extLst>
           </p:cNvPr>
@@ -2318,7 +2318,7 @@
           <a:bodyPr/>
           <a:lstStyle/>
           <a:p>
-            <a:fld id="{99F07D30-DBFD-42BE-B13F-09738E60C017}" type="slidenum">
+            <a:fld id="{F27F1E47-E9E4-43B0-93A2-86EE23F635F6}" type="slidenum">
               <a:rPr kumimoji="1" lang="ja-JP" altLang="en-US" smtClean="0"/>
               <a:t>‹#›</a:t>
             </a:fld>
@@ -2329,7 +2329,7 @@
     </p:spTree>
     <p:extLst>
       <p:ext uri="{BB962C8B-B14F-4D97-AF65-F5344CB8AC3E}">
-        <p14:creationId xmlns:p14="http://schemas.microsoft.com/office/powerpoint/2010/main" val="1030731763"/>
+        <p14:creationId xmlns:p14="http://schemas.microsoft.com/office/powerpoint/2010/main" val="4150571840"/>
       </p:ext>
     </p:extLst>
   </p:cSld>
@@ -2361,7 +2361,7 @@
           <p:cNvPr id="2" name="タイトル 1">
             <a:extLst>
               <a:ext uri="{FF2B5EF4-FFF2-40B4-BE49-F238E27FC236}">
-                <a16:creationId xmlns:a16="http://schemas.microsoft.com/office/drawing/2014/main" id="{3503B498-9B8D-FAB2-D493-AF19E42594AC}"/>
+                <a16:creationId xmlns:a16="http://schemas.microsoft.com/office/drawing/2014/main" id="{A78DA133-080F-C41C-1A9F-D5DC11692060}"/>
               </a:ext>
             </a:extLst>
           </p:cNvPr>
@@ -2394,7 +2394,7 @@
           <p:cNvPr id="3" name="テキスト プレースホルダー 2">
             <a:extLst>
               <a:ext uri="{FF2B5EF4-FFF2-40B4-BE49-F238E27FC236}">
-                <a16:creationId xmlns:a16="http://schemas.microsoft.com/office/drawing/2014/main" id="{63A17ABA-4592-C832-9DB6-084505A812E4}"/>
+                <a16:creationId xmlns:a16="http://schemas.microsoft.com/office/drawing/2014/main" id="{B35BD901-7AD5-61DB-3E4B-20856D35D7A8}"/>
               </a:ext>
             </a:extLst>
           </p:cNvPr>
@@ -2465,7 +2465,7 @@
           <p:cNvPr id="4" name="コンテンツ プレースホルダー 3">
             <a:extLst>
               <a:ext uri="{FF2B5EF4-FFF2-40B4-BE49-F238E27FC236}">
-                <a16:creationId xmlns:a16="http://schemas.microsoft.com/office/drawing/2014/main" id="{67C3CF28-7B3E-3B72-2F36-9ABE24B1768B}"/>
+                <a16:creationId xmlns:a16="http://schemas.microsoft.com/office/drawing/2014/main" id="{C6C1286D-B86E-FDBA-33C3-1D8DC5E533B8}"/>
               </a:ext>
             </a:extLst>
           </p:cNvPr>
@@ -2559,7 +2559,7 @@
           <p:cNvPr id="5" name="テキスト プレースホルダー 4">
             <a:extLst>
               <a:ext uri="{FF2B5EF4-FFF2-40B4-BE49-F238E27FC236}">
-                <a16:creationId xmlns:a16="http://schemas.microsoft.com/office/drawing/2014/main" id="{F986D6BD-B8B2-13AD-C56F-B0DF050C8788}"/>
+                <a16:creationId xmlns:a16="http://schemas.microsoft.com/office/drawing/2014/main" id="{E6D3198E-71C7-617C-F930-C742B3F7A0EB}"/>
               </a:ext>
             </a:extLst>
           </p:cNvPr>
@@ -2630,7 +2630,7 @@
           <p:cNvPr id="6" name="コンテンツ プレースホルダー 5">
             <a:extLst>
               <a:ext uri="{FF2B5EF4-FFF2-40B4-BE49-F238E27FC236}">
-                <a16:creationId xmlns:a16="http://schemas.microsoft.com/office/drawing/2014/main" id="{35CD00B4-1C1B-EEA1-7AFC-F60928C4BDD9}"/>
+                <a16:creationId xmlns:a16="http://schemas.microsoft.com/office/drawing/2014/main" id="{73988ED7-D057-1627-6586-5AEC325B3332}"/>
               </a:ext>
             </a:extLst>
           </p:cNvPr>
@@ -2724,7 +2724,7 @@
           <p:cNvPr id="7" name="日付プレースホルダー 6">
             <a:extLst>
               <a:ext uri="{FF2B5EF4-FFF2-40B4-BE49-F238E27FC236}">
-                <a16:creationId xmlns:a16="http://schemas.microsoft.com/office/drawing/2014/main" id="{372C4CAE-2E21-117E-726C-99B35DBDF956}"/>
+                <a16:creationId xmlns:a16="http://schemas.microsoft.com/office/drawing/2014/main" id="{1EE6F62B-3CE8-F94B-2E6A-07610C7F96C0}"/>
               </a:ext>
             </a:extLst>
           </p:cNvPr>
@@ -2740,7 +2740,7 @@
           <a:bodyPr/>
           <a:lstStyle/>
           <a:p>
-            <a:fld id="{3B3138DF-D476-48FE-AC8B-9CDE86590BB1}" type="datetimeFigureOut">
+            <a:fld id="{34923347-4F8E-44AB-B563-87675CA7FBD5}" type="datetimeFigureOut">
               <a:rPr kumimoji="1" lang="ja-JP" altLang="en-US" smtClean="0"/>
               <a:t>2026/9/20</a:t>
             </a:fld>
@@ -2753,7 +2753,7 @@
           <p:cNvPr id="8" name="フッター プレースホルダー 7">
             <a:extLst>
               <a:ext uri="{FF2B5EF4-FFF2-40B4-BE49-F238E27FC236}">
-                <a16:creationId xmlns:a16="http://schemas.microsoft.com/office/drawing/2014/main" id="{D93EF14C-FBA3-F3E4-6B55-5FF606A75DEE}"/>
+                <a16:creationId xmlns:a16="http://schemas.microsoft.com/office/drawing/2014/main" id="{C4820673-A5DB-2D88-FB62-46FEF417F008}"/>
               </a:ext>
             </a:extLst>
           </p:cNvPr>
@@ -2778,7 +2778,7 @@
           <p:cNvPr id="9" name="スライド番号プレースホルダー 8">
             <a:extLst>
               <a:ext uri="{FF2B5EF4-FFF2-40B4-BE49-F238E27FC236}">
-                <a16:creationId xmlns:a16="http://schemas.microsoft.com/office/drawing/2014/main" id="{A2CA2D3A-FE18-591A-5E25-2EE60DCAB6BC}"/>
+                <a16:creationId xmlns:a16="http://schemas.microsoft.com/office/drawing/2014/main" id="{4C62D321-CD93-CCC7-09B6-51CCA0280843}"/>
               </a:ext>
             </a:extLst>
           </p:cNvPr>
@@ -2794,7 +2794,7 @@
           <a:bodyPr/>
           <a:lstStyle/>
           <a:p>
-            <a:fld id="{99F07D30-DBFD-42BE-B13F-09738E60C017}" type="slidenum">
+            <a:fld id="{F27F1E47-E9E4-43B0-93A2-86EE23F635F6}" type="slidenum">
               <a:rPr kumimoji="1" lang="ja-JP" altLang="en-US" smtClean="0"/>
               <a:t>‹#›</a:t>
             </a:fld>
@@ -2805,7 +2805,7 @@
     </p:spTree>
     <p:extLst>
       <p:ext uri="{BB962C8B-B14F-4D97-AF65-F5344CB8AC3E}">
-        <p14:creationId xmlns:p14="http://schemas.microsoft.com/office/powerpoint/2010/main" val="1922392815"/>
+        <p14:creationId xmlns:p14="http://schemas.microsoft.com/office/powerpoint/2010/main" val="3244474695"/>
       </p:ext>
     </p:extLst>
   </p:cSld>
@@ -2837,7 +2837,7 @@
           <p:cNvPr id="2" name="タイトル 1">
             <a:extLst>
               <a:ext uri="{FF2B5EF4-FFF2-40B4-BE49-F238E27FC236}">
-                <a16:creationId xmlns:a16="http://schemas.microsoft.com/office/drawing/2014/main" id="{8E8FC88B-5B0B-E058-199B-1481B6BD8AFC}"/>
+                <a16:creationId xmlns:a16="http://schemas.microsoft.com/office/drawing/2014/main" id="{2EEA25FC-835D-3DD5-E00B-9BBE76CAEC4D}"/>
               </a:ext>
             </a:extLst>
           </p:cNvPr>
@@ -2865,7 +2865,7 @@
           <p:cNvPr id="3" name="日付プレースホルダー 2">
             <a:extLst>
               <a:ext uri="{FF2B5EF4-FFF2-40B4-BE49-F238E27FC236}">
-                <a16:creationId xmlns:a16="http://schemas.microsoft.com/office/drawing/2014/main" id="{D3DD614F-AA15-223E-6227-D7CC396B946B}"/>
+                <a16:creationId xmlns:a16="http://schemas.microsoft.com/office/drawing/2014/main" id="{37A225D7-E8E9-0B4A-81D0-330CA415D986}"/>
               </a:ext>
             </a:extLst>
           </p:cNvPr>
@@ -2881,7 +2881,7 @@
           <a:bodyPr/>
           <a:lstStyle/>
           <a:p>
-            <a:fld id="{3B3138DF-D476-48FE-AC8B-9CDE86590BB1}" type="datetimeFigureOut">
+            <a:fld id="{34923347-4F8E-44AB-B563-87675CA7FBD5}" type="datetimeFigureOut">
               <a:rPr kumimoji="1" lang="ja-JP" altLang="en-US" smtClean="0"/>
               <a:t>2026/9/20</a:t>
             </a:fld>
@@ -2894,7 +2894,7 @@
           <p:cNvPr id="4" name="フッター プレースホルダー 3">
             <a:extLst>
               <a:ext uri="{FF2B5EF4-FFF2-40B4-BE49-F238E27FC236}">
-                <a16:creationId xmlns:a16="http://schemas.microsoft.com/office/drawing/2014/main" id="{DAF526ED-5F68-D57E-4B8D-DF7FD1A46FCC}"/>
+                <a16:creationId xmlns:a16="http://schemas.microsoft.com/office/drawing/2014/main" id="{29507A29-E734-0D6C-BCEF-7E8484F640CB}"/>
               </a:ext>
             </a:extLst>
           </p:cNvPr>
@@ -2919,7 +2919,7 @@
           <p:cNvPr id="5" name="スライド番号プレースホルダー 4">
             <a:extLst>
               <a:ext uri="{FF2B5EF4-FFF2-40B4-BE49-F238E27FC236}">
-                <a16:creationId xmlns:a16="http://schemas.microsoft.com/office/drawing/2014/main" id="{BFCC2B72-8E44-5671-7CF3-A14F54D39C95}"/>
+                <a16:creationId xmlns:a16="http://schemas.microsoft.com/office/drawing/2014/main" id="{0AB0F79C-A591-4931-EF85-F001271F1C2E}"/>
               </a:ext>
             </a:extLst>
           </p:cNvPr>
@@ -2935,7 +2935,7 @@
           <a:bodyPr/>
           <a:lstStyle/>
           <a:p>
-            <a:fld id="{99F07D30-DBFD-42BE-B13F-09738E60C017}" type="slidenum">
+            <a:fld id="{F27F1E47-E9E4-43B0-93A2-86EE23F635F6}" type="slidenum">
               <a:rPr kumimoji="1" lang="ja-JP" altLang="en-US" smtClean="0"/>
               <a:t>‹#›</a:t>
             </a:fld>
@@ -2946,7 +2946,7 @@
     </p:spTree>
     <p:extLst>
       <p:ext uri="{BB962C8B-B14F-4D97-AF65-F5344CB8AC3E}">
-        <p14:creationId xmlns:p14="http://schemas.microsoft.com/office/powerpoint/2010/main" val="697458350"/>
+        <p14:creationId xmlns:p14="http://schemas.microsoft.com/office/powerpoint/2010/main" val="1158427716"/>
       </p:ext>
     </p:extLst>
   </p:cSld>
@@ -2978,7 +2978,7 @@
           <p:cNvPr id="2" name="日付プレースホルダー 1">
             <a:extLst>
               <a:ext uri="{FF2B5EF4-FFF2-40B4-BE49-F238E27FC236}">
-                <a16:creationId xmlns:a16="http://schemas.microsoft.com/office/drawing/2014/main" id="{CE527B42-B01F-1720-4C13-254F5E8132AE}"/>
+                <a16:creationId xmlns:a16="http://schemas.microsoft.com/office/drawing/2014/main" id="{A97415CD-2037-CE4E-DC4F-65000180749D}"/>
               </a:ext>
             </a:extLst>
           </p:cNvPr>
@@ -2994,7 +2994,7 @@
           <a:bodyPr/>
           <a:lstStyle/>
           <a:p>
-            <a:fld id="{3B3138DF-D476-48FE-AC8B-9CDE86590BB1}" type="datetimeFigureOut">
+            <a:fld id="{34923347-4F8E-44AB-B563-87675CA7FBD5}" type="datetimeFigureOut">
               <a:rPr kumimoji="1" lang="ja-JP" altLang="en-US" smtClean="0"/>
               <a:t>2026/9/20</a:t>
             </a:fld>
@@ -3007,7 +3007,7 @@
           <p:cNvPr id="3" name="フッター プレースホルダー 2">
             <a:extLst>
               <a:ext uri="{FF2B5EF4-FFF2-40B4-BE49-F238E27FC236}">
-                <a16:creationId xmlns:a16="http://schemas.microsoft.com/office/drawing/2014/main" id="{A96A35BB-16EB-3FEF-E84B-DD036BA52A04}"/>
+                <a16:creationId xmlns:a16="http://schemas.microsoft.com/office/drawing/2014/main" id="{AFFA68F3-A794-B4EC-3CE4-FC8F9C3859DD}"/>
               </a:ext>
             </a:extLst>
           </p:cNvPr>
@@ -3032,7 +3032,7 @@
           <p:cNvPr id="4" name="スライド番号プレースホルダー 3">
             <a:extLst>
               <a:ext uri="{FF2B5EF4-FFF2-40B4-BE49-F238E27FC236}">
-                <a16:creationId xmlns:a16="http://schemas.microsoft.com/office/drawing/2014/main" id="{BAEBE2E1-E067-25AA-4541-C4CA2F995552}"/>
+                <a16:creationId xmlns:a16="http://schemas.microsoft.com/office/drawing/2014/main" id="{305D356D-2397-C3F9-898C-AE47879110FE}"/>
               </a:ext>
             </a:extLst>
           </p:cNvPr>
@@ -3048,7 +3048,7 @@
           <a:bodyPr/>
           <a:lstStyle/>
           <a:p>
-            <a:fld id="{99F07D30-DBFD-42BE-B13F-09738E60C017}" type="slidenum">
+            <a:fld id="{F27F1E47-E9E4-43B0-93A2-86EE23F635F6}" type="slidenum">
               <a:rPr kumimoji="1" lang="ja-JP" altLang="en-US" smtClean="0"/>
               <a:t>‹#›</a:t>
             </a:fld>
@@ -3059,7 +3059,7 @@
     </p:spTree>
     <p:extLst>
       <p:ext uri="{BB962C8B-B14F-4D97-AF65-F5344CB8AC3E}">
-        <p14:creationId xmlns:p14="http://schemas.microsoft.com/office/powerpoint/2010/main" val="781803681"/>
+        <p14:creationId xmlns:p14="http://schemas.microsoft.com/office/powerpoint/2010/main" val="2888542737"/>
       </p:ext>
     </p:extLst>
   </p:cSld>
@@ -3091,7 +3091,7 @@
           <p:cNvPr id="2" name="タイトル 1">
             <a:extLst>
               <a:ext uri="{FF2B5EF4-FFF2-40B4-BE49-F238E27FC236}">
-                <a16:creationId xmlns:a16="http://schemas.microsoft.com/office/drawing/2014/main" id="{46482C45-120E-E4FF-43DF-8A71380C0748}"/>
+                <a16:creationId xmlns:a16="http://schemas.microsoft.com/office/drawing/2014/main" id="{9469C0E7-8512-CAC7-8AF0-BBFDA1DF6819}"/>
               </a:ext>
             </a:extLst>
           </p:cNvPr>
@@ -3128,7 +3128,7 @@
           <p:cNvPr id="3" name="コンテンツ プレースホルダー 2">
             <a:extLst>
               <a:ext uri="{FF2B5EF4-FFF2-40B4-BE49-F238E27FC236}">
-                <a16:creationId xmlns:a16="http://schemas.microsoft.com/office/drawing/2014/main" id="{65418610-71A5-078C-5687-5BC224A51190}"/>
+                <a16:creationId xmlns:a16="http://schemas.microsoft.com/office/drawing/2014/main" id="{CAFC70D7-85DD-2B75-59E9-B5227C3EA0F7}"/>
               </a:ext>
             </a:extLst>
           </p:cNvPr>
@@ -3250,7 +3250,7 @@
           <p:cNvPr id="4" name="テキスト プレースホルダー 3">
             <a:extLst>
               <a:ext uri="{FF2B5EF4-FFF2-40B4-BE49-F238E27FC236}">
-                <a16:creationId xmlns:a16="http://schemas.microsoft.com/office/drawing/2014/main" id="{ABE51B2F-CD00-88FE-2831-47741921DFC8}"/>
+                <a16:creationId xmlns:a16="http://schemas.microsoft.com/office/drawing/2014/main" id="{F1FB653E-8D99-3A24-8A96-A19C77F509DB}"/>
               </a:ext>
             </a:extLst>
           </p:cNvPr>
@@ -3321,7 +3321,7 @@
           <p:cNvPr id="5" name="日付プレースホルダー 4">
             <a:extLst>
               <a:ext uri="{FF2B5EF4-FFF2-40B4-BE49-F238E27FC236}">
-                <a16:creationId xmlns:a16="http://schemas.microsoft.com/office/drawing/2014/main" id="{1B33D4FA-F5CD-EA50-D8F1-228AC67EFD02}"/>
+                <a16:creationId xmlns:a16="http://schemas.microsoft.com/office/drawing/2014/main" id="{E9B4031C-1AD4-DD63-7E18-39E8B31B1012}"/>
               </a:ext>
             </a:extLst>
           </p:cNvPr>
@@ -3337,7 +3337,7 @@
           <a:bodyPr/>
           <a:lstStyle/>
           <a:p>
-            <a:fld id="{3B3138DF-D476-48FE-AC8B-9CDE86590BB1}" type="datetimeFigureOut">
+            <a:fld id="{34923347-4F8E-44AB-B563-87675CA7FBD5}" type="datetimeFigureOut">
               <a:rPr kumimoji="1" lang="ja-JP" altLang="en-US" smtClean="0"/>
               <a:t>2026/9/20</a:t>
             </a:fld>
@@ -3350,7 +3350,7 @@
           <p:cNvPr id="6" name="フッター プレースホルダー 5">
             <a:extLst>
               <a:ext uri="{FF2B5EF4-FFF2-40B4-BE49-F238E27FC236}">
-                <a16:creationId xmlns:a16="http://schemas.microsoft.com/office/drawing/2014/main" id="{B1C5AC2A-DC54-FB92-856B-582741AB1961}"/>
+                <a16:creationId xmlns:a16="http://schemas.microsoft.com/office/drawing/2014/main" id="{990CBEE8-50DE-741C-096E-41D3BE7C9E40}"/>
               </a:ext>
             </a:extLst>
           </p:cNvPr>
@@ -3375,7 +3375,7 @@
           <p:cNvPr id="7" name="スライド番号プレースホルダー 6">
             <a:extLst>
               <a:ext uri="{FF2B5EF4-FFF2-40B4-BE49-F238E27FC236}">
-                <a16:creationId xmlns:a16="http://schemas.microsoft.com/office/drawing/2014/main" id="{370D6A8A-DC64-94F1-B188-37AC7F899A78}"/>
+                <a16:creationId xmlns:a16="http://schemas.microsoft.com/office/drawing/2014/main" id="{C410A08D-3796-C5A3-E8EB-14E8BD54EF2C}"/>
               </a:ext>
             </a:extLst>
           </p:cNvPr>
@@ -3391,7 +3391,7 @@
           <a:bodyPr/>
           <a:lstStyle/>
           <a:p>
-            <a:fld id="{99F07D30-DBFD-42BE-B13F-09738E60C017}" type="slidenum">
+            <a:fld id="{F27F1E47-E9E4-43B0-93A2-86EE23F635F6}" type="slidenum">
               <a:rPr kumimoji="1" lang="ja-JP" altLang="en-US" smtClean="0"/>
               <a:t>‹#›</a:t>
             </a:fld>
@@ -3402,7 +3402,7 @@
     </p:spTree>
     <p:extLst>
       <p:ext uri="{BB962C8B-B14F-4D97-AF65-F5344CB8AC3E}">
-        <p14:creationId xmlns:p14="http://schemas.microsoft.com/office/powerpoint/2010/main" val="3106857765"/>
+        <p14:creationId xmlns:p14="http://schemas.microsoft.com/office/powerpoint/2010/main" val="1666263207"/>
       </p:ext>
     </p:extLst>
   </p:cSld>
@@ -3434,7 +3434,7 @@
           <p:cNvPr id="2" name="タイトル 1">
             <a:extLst>
               <a:ext uri="{FF2B5EF4-FFF2-40B4-BE49-F238E27FC236}">
-                <a16:creationId xmlns:a16="http://schemas.microsoft.com/office/drawing/2014/main" id="{E800C03C-679F-6E9A-15A9-883E9D6539CB}"/>
+                <a16:creationId xmlns:a16="http://schemas.microsoft.com/office/drawing/2014/main" id="{B85F173A-CD5D-E26C-F08F-A0D2B5ACC394}"/>
               </a:ext>
             </a:extLst>
           </p:cNvPr>
@@ -3471,7 +3471,7 @@
           <p:cNvPr id="3" name="図プレースホルダー 2">
             <a:extLst>
               <a:ext uri="{FF2B5EF4-FFF2-40B4-BE49-F238E27FC236}">
-                <a16:creationId xmlns:a16="http://schemas.microsoft.com/office/drawing/2014/main" id="{6D40CAF2-0DD4-49C0-B1CE-BE34885B80A8}"/>
+                <a16:creationId xmlns:a16="http://schemas.microsoft.com/office/drawing/2014/main" id="{AA8ECEDD-48B6-0CAD-1E78-B837F339C0C7}"/>
               </a:ext>
             </a:extLst>
           </p:cNvPr>
@@ -3538,7 +3538,7 @@
           <p:cNvPr id="4" name="テキスト プレースホルダー 3">
             <a:extLst>
               <a:ext uri="{FF2B5EF4-FFF2-40B4-BE49-F238E27FC236}">
-                <a16:creationId xmlns:a16="http://schemas.microsoft.com/office/drawing/2014/main" id="{609274E2-5D57-EFE8-8984-9BF51EF25845}"/>
+                <a16:creationId xmlns:a16="http://schemas.microsoft.com/office/drawing/2014/main" id="{3F3A456D-E37E-D516-9AD2-3C516D29A47F}"/>
               </a:ext>
             </a:extLst>
           </p:cNvPr>
@@ -3609,7 +3609,7 @@
           <p:cNvPr id="5" name="日付プレースホルダー 4">
             <a:extLst>
               <a:ext uri="{FF2B5EF4-FFF2-40B4-BE49-F238E27FC236}">
-                <a16:creationId xmlns:a16="http://schemas.microsoft.com/office/drawing/2014/main" id="{EA3FC9C2-7A76-C22A-D179-C3721E32D2BB}"/>
+                <a16:creationId xmlns:a16="http://schemas.microsoft.com/office/drawing/2014/main" id="{C8CD53AD-BF4F-E8A3-A815-27D4196A4803}"/>
               </a:ext>
             </a:extLst>
           </p:cNvPr>
@@ -3625,7 +3625,7 @@
           <a:bodyPr/>
           <a:lstStyle/>
           <a:p>
-            <a:fld id="{3B3138DF-D476-48FE-AC8B-9CDE86590BB1}" type="datetimeFigureOut">
+            <a:fld id="{34923347-4F8E-44AB-B563-87675CA7FBD5}" type="datetimeFigureOut">
               <a:rPr kumimoji="1" lang="ja-JP" altLang="en-US" smtClean="0"/>
               <a:t>2026/9/20</a:t>
             </a:fld>
@@ -3638,7 +3638,7 @@
           <p:cNvPr id="6" name="フッター プレースホルダー 5">
             <a:extLst>
               <a:ext uri="{FF2B5EF4-FFF2-40B4-BE49-F238E27FC236}">
-                <a16:creationId xmlns:a16="http://schemas.microsoft.com/office/drawing/2014/main" id="{057C05B3-446F-928A-04AB-91A7466D3ABC}"/>
+                <a16:creationId xmlns:a16="http://schemas.microsoft.com/office/drawing/2014/main" id="{6BF07C87-6504-132B-F5D3-616C74D0BC40}"/>
               </a:ext>
             </a:extLst>
           </p:cNvPr>
@@ -3663,7 +3663,7 @@
           <p:cNvPr id="7" name="スライド番号プレースホルダー 6">
             <a:extLst>
               <a:ext uri="{FF2B5EF4-FFF2-40B4-BE49-F238E27FC236}">
-                <a16:creationId xmlns:a16="http://schemas.microsoft.com/office/drawing/2014/main" id="{3C8F2983-655D-F1EC-1A51-2CA6F7B340D2}"/>
+                <a16:creationId xmlns:a16="http://schemas.microsoft.com/office/drawing/2014/main" id="{BE342B02-6A8B-FD73-1EAC-F05A5573890A}"/>
               </a:ext>
             </a:extLst>
           </p:cNvPr>
@@ -3679,7 +3679,7 @@
           <a:bodyPr/>
           <a:lstStyle/>
           <a:p>
-            <a:fld id="{99F07D30-DBFD-42BE-B13F-09738E60C017}" type="slidenum">
+            <a:fld id="{F27F1E47-E9E4-43B0-93A2-86EE23F635F6}" type="slidenum">
               <a:rPr kumimoji="1" lang="ja-JP" altLang="en-US" smtClean="0"/>
               <a:t>‹#›</a:t>
             </a:fld>
@@ -3690,7 +3690,7 @@
     </p:spTree>
     <p:extLst>
       <p:ext uri="{BB962C8B-B14F-4D97-AF65-F5344CB8AC3E}">
-        <p14:creationId xmlns:p14="http://schemas.microsoft.com/office/powerpoint/2010/main" val="100911658"/>
+        <p14:creationId xmlns:p14="http://schemas.microsoft.com/office/powerpoint/2010/main" val="2249917682"/>
       </p:ext>
     </p:extLst>
   </p:cSld>
@@ -3727,7 +3727,7 @@
           <p:cNvPr id="2" name="タイトル プレースホルダー 1">
             <a:extLst>
               <a:ext uri="{FF2B5EF4-FFF2-40B4-BE49-F238E27FC236}">
-                <a16:creationId xmlns:a16="http://schemas.microsoft.com/office/drawing/2014/main" id="{E8787595-2F5D-0DC2-8758-050F85CF519E}"/>
+                <a16:creationId xmlns:a16="http://schemas.microsoft.com/office/drawing/2014/main" id="{8109F6FA-181B-0187-597C-A29918169EBE}"/>
               </a:ext>
             </a:extLst>
           </p:cNvPr>
@@ -3765,7 +3765,7 @@
           <p:cNvPr id="3" name="テキスト プレースホルダー 2">
             <a:extLst>
               <a:ext uri="{FF2B5EF4-FFF2-40B4-BE49-F238E27FC236}">
-                <a16:creationId xmlns:a16="http://schemas.microsoft.com/office/drawing/2014/main" id="{4EFA855B-E936-CBF3-E3DB-26E03E06AC57}"/>
+                <a16:creationId xmlns:a16="http://schemas.microsoft.com/office/drawing/2014/main" id="{E45B88FB-49CF-461C-6A59-1A4ECC6B8D2D}"/>
               </a:ext>
             </a:extLst>
           </p:cNvPr>
@@ -3864,7 +3864,7 @@
           <p:cNvPr id="4" name="日付プレースホルダー 3">
             <a:extLst>
               <a:ext uri="{FF2B5EF4-FFF2-40B4-BE49-F238E27FC236}">
-                <a16:creationId xmlns:a16="http://schemas.microsoft.com/office/drawing/2014/main" id="{7DED6E3A-D540-CA4F-D898-2F2B629C7CD8}"/>
+                <a16:creationId xmlns:a16="http://schemas.microsoft.com/office/drawing/2014/main" id="{0FE02B9F-32B6-AB05-BC50-5D4FF5EA753E}"/>
               </a:ext>
             </a:extLst>
           </p:cNvPr>
@@ -3898,7 +3898,7 @@
             </a:lvl1pPr>
           </a:lstStyle>
           <a:p>
-            <a:fld id="{3B3138DF-D476-48FE-AC8B-9CDE86590BB1}" type="datetimeFigureOut">
+            <a:fld id="{34923347-4F8E-44AB-B563-87675CA7FBD5}" type="datetimeFigureOut">
               <a:rPr kumimoji="1" lang="ja-JP" altLang="en-US" smtClean="0"/>
               <a:t>2026/9/20</a:t>
             </a:fld>
@@ -3911,7 +3911,7 @@
           <p:cNvPr id="5" name="フッター プレースホルダー 4">
             <a:extLst>
               <a:ext uri="{FF2B5EF4-FFF2-40B4-BE49-F238E27FC236}">
-                <a16:creationId xmlns:a16="http://schemas.microsoft.com/office/drawing/2014/main" id="{F0B54C2F-559C-F129-8C87-EE2C1A5C7C82}"/>
+                <a16:creationId xmlns:a16="http://schemas.microsoft.com/office/drawing/2014/main" id="{7783FDCE-D16D-A0E3-6362-53660ED39B82}"/>
               </a:ext>
             </a:extLst>
           </p:cNvPr>
@@ -3954,7 +3954,7 @@
           <p:cNvPr id="6" name="スライド番号プレースホルダー 5">
             <a:extLst>
               <a:ext uri="{FF2B5EF4-FFF2-40B4-BE49-F238E27FC236}">
-                <a16:creationId xmlns:a16="http://schemas.microsoft.com/office/drawing/2014/main" id="{01870D30-9EAB-4C0E-C144-516E1AE612C5}"/>
+                <a16:creationId xmlns:a16="http://schemas.microsoft.com/office/drawing/2014/main" id="{11C87728-AF99-5CA9-B38C-62FB297C12CF}"/>
               </a:ext>
             </a:extLst>
           </p:cNvPr>
@@ -3988,7 +3988,7 @@
             </a:lvl1pPr>
           </a:lstStyle>
           <a:p>
-            <a:fld id="{99F07D30-DBFD-42BE-B13F-09738E60C017}" type="slidenum">
+            <a:fld id="{F27F1E47-E9E4-43B0-93A2-86EE23F635F6}" type="slidenum">
               <a:rPr kumimoji="1" lang="ja-JP" altLang="en-US" smtClean="0"/>
               <a:t>‹#›</a:t>
             </a:fld>
@@ -3999,7 +3999,7 @@
     </p:spTree>
     <p:extLst>
       <p:ext uri="{BB962C8B-B14F-4D97-AF65-F5344CB8AC3E}">
-        <p14:creationId xmlns:p14="http://schemas.microsoft.com/office/powerpoint/2010/main" val="1421254563"/>
+        <p14:creationId xmlns:p14="http://schemas.microsoft.com/office/powerpoint/2010/main" val="3705553278"/>
       </p:ext>
     </p:extLst>
   </p:cSld>
@@ -4323,7 +4323,7 @@
           <p:cNvPr id="2" name="タイトル 1">
             <a:extLst>
               <a:ext uri="{FF2B5EF4-FFF2-40B4-BE49-F238E27FC236}">
-                <a16:creationId xmlns:a16="http://schemas.microsoft.com/office/drawing/2014/main" id="{B139C84C-E7C3-BF86-3A38-4C6FE3E75444}"/>
+                <a16:creationId xmlns:a16="http://schemas.microsoft.com/office/drawing/2014/main" id="{0635683B-8A3E-5BBC-B5C8-4774F6FB6523}"/>
               </a:ext>
             </a:extLst>
           </p:cNvPr>
@@ -4355,7 +4355,7 @@
           <p:cNvPr id="3" name="字幕 2">
             <a:extLst>
               <a:ext uri="{FF2B5EF4-FFF2-40B4-BE49-F238E27FC236}">
-                <a16:creationId xmlns:a16="http://schemas.microsoft.com/office/drawing/2014/main" id="{66B4DED8-D8F9-0515-14A9-F130F1D8BFD7}"/>
+                <a16:creationId xmlns:a16="http://schemas.microsoft.com/office/drawing/2014/main" id="{978E1EE2-CFF4-896C-61E3-CEFBE7D9170A}"/>
               </a:ext>
             </a:extLst>
           </p:cNvPr>
@@ -4385,7 +4385,7 @@
     </p:spTree>
     <p:extLst>
       <p:ext uri="{BB962C8B-B14F-4D97-AF65-F5344CB8AC3E}">
-        <p14:creationId xmlns:p14="http://schemas.microsoft.com/office/powerpoint/2010/main" val="3150141436"/>
+        <p14:creationId xmlns:p14="http://schemas.microsoft.com/office/powerpoint/2010/main" val="3361947999"/>
       </p:ext>
     </p:extLst>
   </p:cSld>
@@ -4417,7 +4417,7 @@
           <p:cNvPr id="2" name="タイトル 1">
             <a:extLst>
               <a:ext uri="{FF2B5EF4-FFF2-40B4-BE49-F238E27FC236}">
-                <a16:creationId xmlns:a16="http://schemas.microsoft.com/office/drawing/2014/main" id="{D22247F9-1701-A9CB-327C-8788F1B1326C}"/>
+                <a16:creationId xmlns:a16="http://schemas.microsoft.com/office/drawing/2014/main" id="{252B1713-4FAC-B0E4-F6EB-8ED05D416825}"/>
               </a:ext>
             </a:extLst>
           </p:cNvPr>
@@ -4455,7 +4455,7 @@
     </p:spTree>
     <p:extLst>
       <p:ext uri="{BB962C8B-B14F-4D97-AF65-F5344CB8AC3E}">
-        <p14:creationId xmlns:p14="http://schemas.microsoft.com/office/powerpoint/2010/main" val="1300331894"/>
+        <p14:creationId xmlns:p14="http://schemas.microsoft.com/office/powerpoint/2010/main" val="2030169389"/>
       </p:ext>
     </p:extLst>
   </p:cSld>
@@ -4487,7 +4487,7 @@
           <p:cNvPr id="2" name="タイトル 1">
             <a:extLst>
               <a:ext uri="{FF2B5EF4-FFF2-40B4-BE49-F238E27FC236}">
-                <a16:creationId xmlns:a16="http://schemas.microsoft.com/office/drawing/2014/main" id="{83E5CED7-E337-2DC2-796D-8D91F7B9AE20}"/>
+                <a16:creationId xmlns:a16="http://schemas.microsoft.com/office/drawing/2014/main" id="{1E8329DE-2227-1261-5B62-584585F2C2D3}"/>
               </a:ext>
             </a:extLst>
           </p:cNvPr>
@@ -4519,7 +4519,7 @@
           <p:cNvPr id="3" name="テキスト プレースホルダー 2">
             <a:extLst>
               <a:ext uri="{FF2B5EF4-FFF2-40B4-BE49-F238E27FC236}">
-                <a16:creationId xmlns:a16="http://schemas.microsoft.com/office/drawing/2014/main" id="{2F9A9FD9-9299-68BF-E2FB-1294E79E85A4}"/>
+                <a16:creationId xmlns:a16="http://schemas.microsoft.com/office/drawing/2014/main" id="{5849283D-AD6C-D29F-E653-179AC81AE6F0}"/>
               </a:ext>
             </a:extLst>
           </p:cNvPr>
@@ -4578,7 +4578,7 @@
     </p:spTree>
     <p:extLst>
       <p:ext uri="{BB962C8B-B14F-4D97-AF65-F5344CB8AC3E}">
-        <p14:creationId xmlns:p14="http://schemas.microsoft.com/office/powerpoint/2010/main" val="2942437965"/>
+        <p14:creationId xmlns:p14="http://schemas.microsoft.com/office/powerpoint/2010/main" val="1672237442"/>
       </p:ext>
     </p:extLst>
   </p:cSld>
@@ -4610,7 +4610,7 @@
           <p:cNvPr id="2" name="タイトル 1">
             <a:extLst>
               <a:ext uri="{FF2B5EF4-FFF2-40B4-BE49-F238E27FC236}">
-                <a16:creationId xmlns:a16="http://schemas.microsoft.com/office/drawing/2014/main" id="{1FD227BF-97F5-FF78-DB2E-715725A739B5}"/>
+                <a16:creationId xmlns:a16="http://schemas.microsoft.com/office/drawing/2014/main" id="{46D1100B-217E-49E6-0CE1-B11D02DC8B1C}"/>
               </a:ext>
             </a:extLst>
           </p:cNvPr>
@@ -4642,7 +4642,7 @@
           <p:cNvPr id="3" name="テキスト プレースホルダー 2">
             <a:extLst>
               <a:ext uri="{FF2B5EF4-FFF2-40B4-BE49-F238E27FC236}">
-                <a16:creationId xmlns:a16="http://schemas.microsoft.com/office/drawing/2014/main" id="{77C410D7-F7D2-7F26-8CAE-7E89B2C2F7B8}"/>
+                <a16:creationId xmlns:a16="http://schemas.microsoft.com/office/drawing/2014/main" id="{B63EE4CA-DB1D-B1F0-CF99-75039CE88423}"/>
               </a:ext>
             </a:extLst>
           </p:cNvPr>
@@ -4743,7 +4743,7 @@
     </p:spTree>
     <p:extLst>
       <p:ext uri="{BB962C8B-B14F-4D97-AF65-F5344CB8AC3E}">
-        <p14:creationId xmlns:p14="http://schemas.microsoft.com/office/powerpoint/2010/main" val="1573029312"/>
+        <p14:creationId xmlns:p14="http://schemas.microsoft.com/office/powerpoint/2010/main" val="328691247"/>
       </p:ext>
     </p:extLst>
   </p:cSld>
